--- a/docs/PFD200_Industry_Research.pptx
+++ b/docs/PFD200_Industry_Research.pptx
@@ -1918,7 +1918,7 @@
                   <a:schemeClr val="tx1"/>
                 </a:solidFill>
               </a:rPr>
-              <a:t>Why it fits: IBM 24/7 support and my own ISP (2000–07), seven years in UK logistics, used to night shifts and driving</a:t>
+              <a:t>Why it fits: 24/7 support for an IBM authorised dealer and my own ISP (1999–2007), seven years in UK logistics, used to night shifts and driving</a:t>
             </a:r>
             <a:endParaRPr lang="en-US" sz="1400" dirty="0"/>
           </a:p>
